--- a/img/testing/testing images.pptx
+++ b/img/testing/testing images.pptx
@@ -8,6 +8,7 @@
     <p:sldId id="260" r:id="rId2"/>
     <p:sldId id="258" r:id="rId3"/>
     <p:sldId id="259" r:id="rId4"/>
+    <p:sldId id="261" r:id="rId5"/>
   </p:sldIdLst>
   <p:sldSz cx="12192000" cy="6858000"/>
   <p:notesSz cx="6858000" cy="9144000"/>
@@ -106,6 +107,11 @@
       </a:defRPr>
     </a:lvl9pPr>
   </p:defaultTextStyle>
+  <p:extLst>
+    <p:ext uri="{EFAFB233-063F-42B5-8137-9DF3F51BA10A}">
+      <p15:sldGuideLst xmlns:p15="http://schemas.microsoft.com/office/powerpoint/2012/main"/>
+    </p:ext>
+  </p:extLst>
 </p:presentation>
 </file>
 
@@ -3354,59 +3360,80 @@
       </p:sp>
       <p:pic>
         <p:nvPicPr>
-          <p:cNvPr id="8" name="내용 개체 틀 7" descr="Android 7.0">
-            <a:extLst>
-              <a:ext uri="{FF2B5EF4-FFF2-40B4-BE49-F238E27FC236}">
-                <a16:creationId xmlns:a16="http://schemas.microsoft.com/office/drawing/2014/main" id="{8261EDCB-534D-D238-1841-02226BAA31C9}"/>
+          <p:cNvPr id="1026" name="Picture 2" descr="Plane - Free transport icons">
+            <a:extLst>
+              <a:ext uri="{FF2B5EF4-FFF2-40B4-BE49-F238E27FC236}">
+                <a16:creationId xmlns:a16="http://schemas.microsoft.com/office/drawing/2014/main" id="{1B44FA8F-30F6-0A89-9375-0A98A094D943}"/>
               </a:ext>
             </a:extLst>
           </p:cNvPr>
           <p:cNvPicPr>
-            <a:picLocks noGrp="1" noChangeAspect="1"/>
+            <a:picLocks noChangeAspect="1" noChangeArrowheads="1"/>
           </p:cNvPicPr>
-          <p:nvPr>
-            <p:ph idx="1"/>
-          </p:nvPr>
+          <p:nvPr/>
         </p:nvPicPr>
         <p:blipFill>
-          <a:blip r:embed="rId2"/>
-          <a:srcRect b="27344"/>
+          <a:blip r:embed="rId2">
+            <a:extLst>
+              <a:ext uri="{28A0092B-C50C-407E-A947-70E740481C1C}">
+                <a14:useLocalDpi xmlns:a14="http://schemas.microsoft.com/office/drawing/2010/main" val="0"/>
+              </a:ext>
+            </a:extLst>
+          </a:blip>
+          <a:srcRect/>
           <a:stretch>
             <a:fillRect/>
           </a:stretch>
         </p:blipFill>
-        <p:spPr>
+        <p:spPr bwMode="auto">
           <a:xfrm>
-            <a:off x="948266" y="2356649"/>
-            <a:ext cx="4876800" cy="3543288"/>
+            <a:off x="1259732" y="2510159"/>
+            <a:ext cx="3296645" cy="3296645"/>
           </a:xfrm>
           <a:prstGeom prst="rect">
             <a:avLst/>
           </a:prstGeom>
+          <a:noFill/>
+          <a:extLst>
+            <a:ext uri="{909E8E84-426E-40DD-AFC4-6F175D3DCCD1}">
+              <a14:hiddenFill xmlns:a14="http://schemas.microsoft.com/office/drawing/2010/main">
+                <a:solidFill>
+                  <a:srgbClr val="FFFFFF"/>
+                </a:solidFill>
+              </a14:hiddenFill>
+            </a:ext>
+          </a:extLst>
         </p:spPr>
       </p:pic>
       <p:pic>
         <p:nvPicPr>
-          <p:cNvPr id="4" name="내용 개체 틀 7" descr="Android 7.0">
-            <a:extLst>
-              <a:ext uri="{FF2B5EF4-FFF2-40B4-BE49-F238E27FC236}">
-                <a16:creationId xmlns:a16="http://schemas.microsoft.com/office/drawing/2014/main" id="{FB7CDE70-6D16-1ADD-EFDA-D299397AA10C}"/>
+          <p:cNvPr id="6" name="Picture 2" descr="Plane - Free transport icons">
+            <a:extLst>
+              <a:ext uri="{FF2B5EF4-FFF2-40B4-BE49-F238E27FC236}">
+                <a16:creationId xmlns:a16="http://schemas.microsoft.com/office/drawing/2014/main" id="{B83F0A42-92F0-80EA-71C1-1333E0D3AFE7}"/>
               </a:ext>
             </a:extLst>
           </p:cNvPr>
           <p:cNvPicPr>
-            <a:picLocks noChangeAspect="1"/>
+            <a:picLocks noChangeAspect="1" noChangeArrowheads="1"/>
           </p:cNvPicPr>
           <p:nvPr/>
         </p:nvPicPr>
         <p:blipFill>
           <a:blip r:embed="rId3">
+            <a:duotone>
+              <a:prstClr val="black"/>
+              <a:schemeClr val="tx2">
+                <a:tint val="45000"/>
+                <a:satMod val="400000"/>
+              </a:schemeClr>
+            </a:duotone>
             <a:extLst>
               <a:ext uri="{BEBA8EAE-BF5A-486C-A8C5-ECC9F3942E4B}">
                 <a14:imgProps xmlns:a14="http://schemas.microsoft.com/office/drawing/2010/main">
                   <a14:imgLayer r:embed="rId4">
                     <a14:imgEffect>
-                      <a14:saturation sat="0"/>
+                      <a14:artisticGlowEdges/>
                     </a14:imgEffect>
                     <a14:imgEffect>
                       <a14:brightnessContrast bright="-40000" contrast="40000"/>
@@ -3414,21 +3441,34 @@
                   </a14:imgLayer>
                 </a14:imgProps>
               </a:ext>
+              <a:ext uri="{28A0092B-C50C-407E-A947-70E740481C1C}">
+                <a14:useLocalDpi xmlns:a14="http://schemas.microsoft.com/office/drawing/2010/main" val="0"/>
+              </a:ext>
             </a:extLst>
           </a:blip>
-          <a:srcRect b="27344"/>
+          <a:srcRect/>
           <a:stretch>
             <a:fillRect/>
           </a:stretch>
         </p:blipFill>
-        <p:spPr>
+        <p:spPr bwMode="auto">
           <a:xfrm>
-            <a:off x="6756399" y="2263516"/>
-            <a:ext cx="4876800" cy="3543288"/>
+            <a:off x="6668408" y="2397455"/>
+            <a:ext cx="3296645" cy="3296645"/>
           </a:xfrm>
           <a:prstGeom prst="rect">
             <a:avLst/>
           </a:prstGeom>
+          <a:noFill/>
+          <a:extLst>
+            <a:ext uri="{909E8E84-426E-40DD-AFC4-6F175D3DCCD1}">
+              <a14:hiddenFill xmlns:a14="http://schemas.microsoft.com/office/drawing/2010/main">
+                <a:solidFill>
+                  <a:srgbClr val="FFFFFF"/>
+                </a:solidFill>
+              </a14:hiddenFill>
+            </a:ext>
+          </a:extLst>
         </p:spPr>
       </p:pic>
     </p:spTree>
@@ -3733,6 +3773,840 @@
     <p:extLst>
       <p:ext uri="{BB962C8B-B14F-4D97-AF65-F5344CB8AC3E}">
         <p14:creationId xmlns:p14="http://schemas.microsoft.com/office/powerpoint/2010/main" val="3520707626"/>
+      </p:ext>
+    </p:extLst>
+  </p:cSld>
+  <p:clrMapOvr>
+    <a:masterClrMapping/>
+  </p:clrMapOvr>
+</p:sld>
+</file>
+
+<file path=ppt/slides/slide4.xml><?xml version="1.0" encoding="utf-8"?>
+<p:sld xmlns:a="http://schemas.openxmlformats.org/drawingml/2006/main" xmlns:r="http://schemas.openxmlformats.org/officeDocument/2006/relationships" xmlns:p="http://schemas.openxmlformats.org/presentationml/2006/main">
+  <p:cSld>
+    <p:spTree>
+      <p:nvGrpSpPr>
+        <p:cNvPr id="1" name=""/>
+        <p:cNvGrpSpPr/>
+        <p:nvPr/>
+      </p:nvGrpSpPr>
+      <p:grpSpPr>
+        <a:xfrm>
+          <a:off x="0" y="0"/>
+          <a:ext cx="0" cy="0"/>
+          <a:chOff x="0" y="0"/>
+          <a:chExt cx="0" cy="0"/>
+        </a:xfrm>
+      </p:grpSpPr>
+      <p:graphicFrame>
+        <p:nvGraphicFramePr>
+          <p:cNvPr id="58" name="표 57">
+            <a:extLst>
+              <a:ext uri="{FF2B5EF4-FFF2-40B4-BE49-F238E27FC236}">
+                <a16:creationId xmlns:a16="http://schemas.microsoft.com/office/drawing/2014/main" id="{C1828ED3-DF83-C1DD-BCF6-B08F2B3E38AA}"/>
+              </a:ext>
+            </a:extLst>
+          </p:cNvPr>
+          <p:cNvGraphicFramePr>
+            <a:graphicFrameLocks noGrp="1"/>
+          </p:cNvGraphicFramePr>
+          <p:nvPr>
+            <p:extLst>
+              <p:ext uri="{D42A27DB-BD31-4B8C-83A1-F6EECF244321}">
+                <p14:modId xmlns:p14="http://schemas.microsoft.com/office/powerpoint/2010/main" val="4194371142"/>
+              </p:ext>
+            </p:extLst>
+          </p:nvPr>
+        </p:nvGraphicFramePr>
+        <p:xfrm>
+          <a:off x="5195135" y="2309091"/>
+          <a:ext cx="5528286" cy="2447091"/>
+        </p:xfrm>
+        <a:graphic>
+          <a:graphicData uri="http://schemas.openxmlformats.org/drawingml/2006/table">
+            <a:tbl>
+              <a:tblPr firstRow="1" bandRow="1">
+                <a:tableStyleId>{5940675A-B579-460E-94D1-54222C63F5DA}</a:tableStyleId>
+              </a:tblPr>
+              <a:tblGrid>
+                <a:gridCol w="1842762">
+                  <a:extLst>
+                    <a:ext uri="{9D8B030D-6E8A-4147-A177-3AD203B41FA5}">
+                      <a16:colId xmlns:a16="http://schemas.microsoft.com/office/drawing/2014/main" val="3906521690"/>
+                    </a:ext>
+                  </a:extLst>
+                </a:gridCol>
+                <a:gridCol w="1842762">
+                  <a:extLst>
+                    <a:ext uri="{9D8B030D-6E8A-4147-A177-3AD203B41FA5}">
+                      <a16:colId xmlns:a16="http://schemas.microsoft.com/office/drawing/2014/main" val="876531367"/>
+                    </a:ext>
+                  </a:extLst>
+                </a:gridCol>
+                <a:gridCol w="1842762">
+                  <a:extLst>
+                    <a:ext uri="{9D8B030D-6E8A-4147-A177-3AD203B41FA5}">
+                      <a16:colId xmlns:a16="http://schemas.microsoft.com/office/drawing/2014/main" val="2186945738"/>
+                    </a:ext>
+                  </a:extLst>
+                </a:gridCol>
+              </a:tblGrid>
+              <a:tr h="2081331">
+                <a:tc>
+                  <a:txBody>
+                    <a:bodyPr/>
+                    <a:lstStyle/>
+                    <a:p>
+                      <a:pPr latinLnBrk="1"/>
+                      <a:endParaRPr lang="ko-KR" altLang="en-US" dirty="0"/>
+                    </a:p>
+                  </a:txBody>
+                  <a:tcPr/>
+                </a:tc>
+                <a:tc>
+                  <a:txBody>
+                    <a:bodyPr/>
+                    <a:lstStyle/>
+                    <a:p>
+                      <a:pPr latinLnBrk="1"/>
+                      <a:endParaRPr lang="ko-KR" altLang="en-US"/>
+                    </a:p>
+                  </a:txBody>
+                  <a:tcPr/>
+                </a:tc>
+                <a:tc>
+                  <a:txBody>
+                    <a:bodyPr/>
+                    <a:lstStyle/>
+                    <a:p>
+                      <a:pPr latinLnBrk="1"/>
+                      <a:endParaRPr lang="ko-KR" altLang="en-US" dirty="0"/>
+                    </a:p>
+                  </a:txBody>
+                  <a:tcPr/>
+                </a:tc>
+                <a:extLst>
+                  <a:ext uri="{0D108BD9-81ED-4DB2-BD59-A6C34878D82A}">
+                    <a16:rowId xmlns:a16="http://schemas.microsoft.com/office/drawing/2014/main" val="3460106916"/>
+                  </a:ext>
+                </a:extLst>
+              </a:tr>
+              <a:tr h="350463">
+                <a:tc>
+                  <a:txBody>
+                    <a:bodyPr/>
+                    <a:lstStyle/>
+                    <a:p>
+                      <a:pPr latinLnBrk="1"/>
+                      <a:r>
+                        <a:rPr lang="en-US" altLang="ko-KR" dirty="0"/>
+                        <a:t>1</a:t>
+                      </a:r>
+                      <a:endParaRPr lang="ko-KR" altLang="en-US" dirty="0"/>
+                    </a:p>
+                  </a:txBody>
+                  <a:tcPr/>
+                </a:tc>
+                <a:tc>
+                  <a:txBody>
+                    <a:bodyPr/>
+                    <a:lstStyle/>
+                    <a:p>
+                      <a:pPr latinLnBrk="1"/>
+                      <a:r>
+                        <a:rPr lang="en-US" altLang="ko-KR" dirty="0"/>
+                        <a:t>2</a:t>
+                      </a:r>
+                      <a:endParaRPr lang="ko-KR" altLang="en-US" dirty="0"/>
+                    </a:p>
+                  </a:txBody>
+                  <a:tcPr/>
+                </a:tc>
+                <a:tc>
+                  <a:txBody>
+                    <a:bodyPr/>
+                    <a:lstStyle/>
+                    <a:p>
+                      <a:pPr latinLnBrk="1"/>
+                      <a:r>
+                        <a:rPr lang="en-US" altLang="ko-KR" dirty="0"/>
+                        <a:t>3</a:t>
+                      </a:r>
+                      <a:endParaRPr lang="ko-KR" altLang="en-US" dirty="0"/>
+                    </a:p>
+                  </a:txBody>
+                  <a:tcPr/>
+                </a:tc>
+                <a:extLst>
+                  <a:ext uri="{0D108BD9-81ED-4DB2-BD59-A6C34878D82A}">
+                    <a16:rowId xmlns:a16="http://schemas.microsoft.com/office/drawing/2014/main" val="1533922718"/>
+                  </a:ext>
+                </a:extLst>
+              </a:tr>
+            </a:tbl>
+          </a:graphicData>
+        </a:graphic>
+      </p:graphicFrame>
+      <p:grpSp>
+        <p:nvGrpSpPr>
+          <p:cNvPr id="13" name="그룹 12">
+            <a:extLst>
+              <a:ext uri="{FF2B5EF4-FFF2-40B4-BE49-F238E27FC236}">
+                <a16:creationId xmlns:a16="http://schemas.microsoft.com/office/drawing/2014/main" id="{647EAFD2-8E67-6AC3-FF66-CBD04DAAF827}"/>
+              </a:ext>
+            </a:extLst>
+          </p:cNvPr>
+          <p:cNvGrpSpPr/>
+          <p:nvPr/>
+        </p:nvGrpSpPr>
+        <p:grpSpPr>
+          <a:xfrm>
+            <a:off x="1468579" y="2805545"/>
+            <a:ext cx="1847275" cy="1671783"/>
+            <a:chOff x="3426689" y="2216727"/>
+            <a:chExt cx="2576948" cy="2576947"/>
+          </a:xfrm>
+        </p:grpSpPr>
+        <p:sp>
+          <p:nvSpPr>
+            <p:cNvPr id="4" name="직사각형 3">
+              <a:extLst>
+                <a:ext uri="{FF2B5EF4-FFF2-40B4-BE49-F238E27FC236}">
+                  <a16:creationId xmlns:a16="http://schemas.microsoft.com/office/drawing/2014/main" id="{B55D2BE3-A614-6BD5-5BAD-D23FA81A4D85}"/>
+                </a:ext>
+              </a:extLst>
+            </p:cNvPr>
+            <p:cNvSpPr/>
+            <p:nvPr/>
+          </p:nvSpPr>
+          <p:spPr>
+            <a:xfrm>
+              <a:off x="3426689" y="2992581"/>
+              <a:ext cx="1800000" cy="1800000"/>
+            </a:xfrm>
+            <a:prstGeom prst="rect">
+              <a:avLst/>
+            </a:prstGeom>
+            <a:solidFill>
+              <a:schemeClr val="bg1"/>
+            </a:solidFill>
+            <a:ln w="38100">
+              <a:solidFill>
+                <a:schemeClr val="tx1"/>
+              </a:solidFill>
+            </a:ln>
+          </p:spPr>
+          <p:style>
+            <a:lnRef idx="2">
+              <a:schemeClr val="accent1">
+                <a:shade val="15000"/>
+              </a:schemeClr>
+            </a:lnRef>
+            <a:fillRef idx="1">
+              <a:schemeClr val="accent1"/>
+            </a:fillRef>
+            <a:effectRef idx="0">
+              <a:schemeClr val="accent1"/>
+            </a:effectRef>
+            <a:fontRef idx="minor">
+              <a:schemeClr val="lt1"/>
+            </a:fontRef>
+          </p:style>
+          <p:txBody>
+            <a:bodyPr rtlCol="0" anchor="ctr"/>
+            <a:lstStyle/>
+            <a:p>
+              <a:pPr algn="ctr"/>
+              <a:endParaRPr lang="ko-KR" altLang="en-US"/>
+            </a:p>
+          </p:txBody>
+        </p:sp>
+        <p:sp>
+          <p:nvSpPr>
+            <p:cNvPr id="10" name="평행 사변형 9">
+              <a:extLst>
+                <a:ext uri="{FF2B5EF4-FFF2-40B4-BE49-F238E27FC236}">
+                  <a16:creationId xmlns:a16="http://schemas.microsoft.com/office/drawing/2014/main" id="{32631E5B-9806-38AF-246C-47143CC8F71E}"/>
+                </a:ext>
+              </a:extLst>
+            </p:cNvPr>
+            <p:cNvSpPr/>
+            <p:nvPr/>
+          </p:nvSpPr>
+          <p:spPr>
+            <a:xfrm>
+              <a:off x="3426689" y="2216727"/>
+              <a:ext cx="2576947" cy="775854"/>
+            </a:xfrm>
+            <a:prstGeom prst="parallelogram">
+              <a:avLst>
+                <a:gd name="adj" fmla="val 100000"/>
+              </a:avLst>
+            </a:prstGeom>
+            <a:solidFill>
+              <a:schemeClr val="bg1"/>
+            </a:solidFill>
+            <a:ln w="38100">
+              <a:solidFill>
+                <a:schemeClr val="tx1"/>
+              </a:solidFill>
+            </a:ln>
+          </p:spPr>
+          <p:style>
+            <a:lnRef idx="2">
+              <a:schemeClr val="accent1">
+                <a:shade val="15000"/>
+              </a:schemeClr>
+            </a:lnRef>
+            <a:fillRef idx="1">
+              <a:schemeClr val="accent1"/>
+            </a:fillRef>
+            <a:effectRef idx="0">
+              <a:schemeClr val="accent1"/>
+            </a:effectRef>
+            <a:fontRef idx="minor">
+              <a:schemeClr val="lt1"/>
+            </a:fontRef>
+          </p:style>
+          <p:txBody>
+            <a:bodyPr rtlCol="0" anchor="ctr"/>
+            <a:lstStyle/>
+            <a:p>
+              <a:pPr algn="ctr"/>
+              <a:endParaRPr lang="ko-KR" altLang="en-US"/>
+            </a:p>
+          </p:txBody>
+        </p:sp>
+        <p:sp>
+          <p:nvSpPr>
+            <p:cNvPr id="12" name="평행 사변형 11">
+              <a:extLst>
+                <a:ext uri="{FF2B5EF4-FFF2-40B4-BE49-F238E27FC236}">
+                  <a16:creationId xmlns:a16="http://schemas.microsoft.com/office/drawing/2014/main" id="{4735D997-74C1-40A3-E90E-3C94FCA769AA}"/>
+                </a:ext>
+              </a:extLst>
+            </p:cNvPr>
+            <p:cNvSpPr/>
+            <p:nvPr/>
+          </p:nvSpPr>
+          <p:spPr>
+            <a:xfrm rot="5400000" flipV="1">
+              <a:off x="4327236" y="3117274"/>
+              <a:ext cx="2576947" cy="775854"/>
+            </a:xfrm>
+            <a:prstGeom prst="parallelogram">
+              <a:avLst>
+                <a:gd name="adj" fmla="val 100000"/>
+              </a:avLst>
+            </a:prstGeom>
+            <a:solidFill>
+              <a:schemeClr val="bg1"/>
+            </a:solidFill>
+            <a:ln w="38100">
+              <a:solidFill>
+                <a:schemeClr val="tx1"/>
+              </a:solidFill>
+            </a:ln>
+          </p:spPr>
+          <p:style>
+            <a:lnRef idx="2">
+              <a:schemeClr val="accent1">
+                <a:shade val="15000"/>
+              </a:schemeClr>
+            </a:lnRef>
+            <a:fillRef idx="1">
+              <a:schemeClr val="accent1"/>
+            </a:fillRef>
+            <a:effectRef idx="0">
+              <a:schemeClr val="accent1"/>
+            </a:effectRef>
+            <a:fontRef idx="minor">
+              <a:schemeClr val="lt1"/>
+            </a:fontRef>
+          </p:style>
+          <p:txBody>
+            <a:bodyPr rtlCol="0" anchor="ctr"/>
+            <a:lstStyle/>
+            <a:p>
+              <a:pPr algn="ctr"/>
+              <a:endParaRPr lang="ko-KR" altLang="en-US"/>
+            </a:p>
+          </p:txBody>
+        </p:sp>
+      </p:grpSp>
+      <p:sp>
+        <p:nvSpPr>
+          <p:cNvPr id="50" name="화살표: 아래쪽 49">
+            <a:extLst>
+              <a:ext uri="{FF2B5EF4-FFF2-40B4-BE49-F238E27FC236}">
+                <a16:creationId xmlns:a16="http://schemas.microsoft.com/office/drawing/2014/main" id="{3CC6B36B-4D40-1AAF-8C0E-87D9E4A74FD1}"/>
+              </a:ext>
+            </a:extLst>
+          </p:cNvPr>
+          <p:cNvSpPr/>
+          <p:nvPr/>
+        </p:nvSpPr>
+        <p:spPr>
+          <a:xfrm>
+            <a:off x="2104503" y="2140425"/>
+            <a:ext cx="484632" cy="978408"/>
+          </a:xfrm>
+          <a:prstGeom prst="downArrow">
+            <a:avLst/>
+          </a:prstGeom>
+        </p:spPr>
+        <p:style>
+          <a:lnRef idx="2">
+            <a:schemeClr val="accent1">
+              <a:shade val="15000"/>
+            </a:schemeClr>
+          </a:lnRef>
+          <a:fillRef idx="1">
+            <a:schemeClr val="accent1"/>
+          </a:fillRef>
+          <a:effectRef idx="0">
+            <a:schemeClr val="accent1"/>
+          </a:effectRef>
+          <a:fontRef idx="minor">
+            <a:schemeClr val="lt1"/>
+          </a:fontRef>
+        </p:style>
+        <p:txBody>
+          <a:bodyPr rtlCol="0" anchor="ctr"/>
+          <a:lstStyle/>
+          <a:p>
+            <a:pPr algn="ctr"/>
+            <a:endParaRPr lang="ko-KR" altLang="en-US"/>
+          </a:p>
+        </p:txBody>
+      </p:sp>
+      <p:sp>
+        <p:nvSpPr>
+          <p:cNvPr id="51" name="화살표: 아래쪽 50">
+            <a:extLst>
+              <a:ext uri="{FF2B5EF4-FFF2-40B4-BE49-F238E27FC236}">
+                <a16:creationId xmlns:a16="http://schemas.microsoft.com/office/drawing/2014/main" id="{31EC0749-1DDA-4E28-839C-003F5014CA00}"/>
+              </a:ext>
+            </a:extLst>
+          </p:cNvPr>
+          <p:cNvSpPr/>
+          <p:nvPr/>
+        </p:nvSpPr>
+        <p:spPr>
+          <a:xfrm rot="14108168">
+            <a:off x="1390579" y="3773215"/>
+            <a:ext cx="484632" cy="978408"/>
+          </a:xfrm>
+          <a:prstGeom prst="downArrow">
+            <a:avLst/>
+          </a:prstGeom>
+        </p:spPr>
+        <p:style>
+          <a:lnRef idx="2">
+            <a:schemeClr val="accent1">
+              <a:shade val="15000"/>
+            </a:schemeClr>
+          </a:lnRef>
+          <a:fillRef idx="1">
+            <a:schemeClr val="accent1"/>
+          </a:fillRef>
+          <a:effectRef idx="0">
+            <a:schemeClr val="accent1"/>
+          </a:effectRef>
+          <a:fontRef idx="minor">
+            <a:schemeClr val="lt1"/>
+          </a:fontRef>
+        </p:style>
+        <p:txBody>
+          <a:bodyPr rtlCol="0" anchor="ctr"/>
+          <a:lstStyle/>
+          <a:p>
+            <a:pPr algn="ctr"/>
+            <a:endParaRPr lang="ko-KR" altLang="en-US"/>
+          </a:p>
+        </p:txBody>
+      </p:sp>
+      <p:sp>
+        <p:nvSpPr>
+          <p:cNvPr id="52" name="화살표: 아래쪽 51">
+            <a:extLst>
+              <a:ext uri="{FF2B5EF4-FFF2-40B4-BE49-F238E27FC236}">
+                <a16:creationId xmlns:a16="http://schemas.microsoft.com/office/drawing/2014/main" id="{0F8E1CD2-1B5D-2DFB-6097-4AF8C4987597}"/>
+              </a:ext>
+            </a:extLst>
+          </p:cNvPr>
+          <p:cNvSpPr/>
+          <p:nvPr/>
+        </p:nvSpPr>
+        <p:spPr>
+          <a:xfrm rot="5400000">
+            <a:off x="3284657" y="3152233"/>
+            <a:ext cx="484632" cy="978408"/>
+          </a:xfrm>
+          <a:prstGeom prst="downArrow">
+            <a:avLst/>
+          </a:prstGeom>
+        </p:spPr>
+        <p:style>
+          <a:lnRef idx="2">
+            <a:schemeClr val="accent1">
+              <a:shade val="15000"/>
+            </a:schemeClr>
+          </a:lnRef>
+          <a:fillRef idx="1">
+            <a:schemeClr val="accent1"/>
+          </a:fillRef>
+          <a:effectRef idx="0">
+            <a:schemeClr val="accent1"/>
+          </a:effectRef>
+          <a:fontRef idx="minor">
+            <a:schemeClr val="lt1"/>
+          </a:fontRef>
+        </p:style>
+        <p:txBody>
+          <a:bodyPr rtlCol="0" anchor="ctr"/>
+          <a:lstStyle/>
+          <a:p>
+            <a:pPr algn="ctr"/>
+            <a:endParaRPr lang="ko-KR" altLang="en-US"/>
+          </a:p>
+        </p:txBody>
+      </p:sp>
+      <p:sp>
+        <p:nvSpPr>
+          <p:cNvPr id="54" name="타원 53">
+            <a:extLst>
+              <a:ext uri="{FF2B5EF4-FFF2-40B4-BE49-F238E27FC236}">
+                <a16:creationId xmlns:a16="http://schemas.microsoft.com/office/drawing/2014/main" id="{A791C3AA-C7A1-F7D2-8E06-05F0CBF10D35}"/>
+              </a:ext>
+            </a:extLst>
+          </p:cNvPr>
+          <p:cNvSpPr/>
+          <p:nvPr/>
+        </p:nvSpPr>
+        <p:spPr>
+          <a:xfrm>
+            <a:off x="2129764" y="1615860"/>
+            <a:ext cx="434109" cy="429543"/>
+          </a:xfrm>
+          <a:prstGeom prst="ellipse">
+            <a:avLst/>
+          </a:prstGeom>
+          <a:solidFill>
+            <a:schemeClr val="bg1"/>
+          </a:solidFill>
+          <a:ln>
+            <a:solidFill>
+              <a:schemeClr val="tx1"/>
+            </a:solidFill>
+          </a:ln>
+        </p:spPr>
+        <p:style>
+          <a:lnRef idx="2">
+            <a:schemeClr val="accent1">
+              <a:shade val="15000"/>
+            </a:schemeClr>
+          </a:lnRef>
+          <a:fillRef idx="1">
+            <a:schemeClr val="accent1"/>
+          </a:fillRef>
+          <a:effectRef idx="0">
+            <a:schemeClr val="accent1"/>
+          </a:effectRef>
+          <a:fontRef idx="minor">
+            <a:schemeClr val="lt1"/>
+          </a:fontRef>
+        </p:style>
+        <p:txBody>
+          <a:bodyPr rtlCol="0" anchor="ctr"/>
+          <a:lstStyle/>
+          <a:p>
+            <a:pPr algn="ctr"/>
+            <a:r>
+              <a:rPr lang="en-US" altLang="ko-KR" dirty="0">
+                <a:solidFill>
+                  <a:sysClr val="windowText" lastClr="000000"/>
+                </a:solidFill>
+              </a:rPr>
+              <a:t>1</a:t>
+            </a:r>
+            <a:endParaRPr lang="ko-KR" altLang="en-US" dirty="0">
+              <a:solidFill>
+                <a:sysClr val="windowText" lastClr="000000"/>
+              </a:solidFill>
+            </a:endParaRPr>
+          </a:p>
+        </p:txBody>
+      </p:sp>
+      <p:sp>
+        <p:nvSpPr>
+          <p:cNvPr id="55" name="타원 54">
+            <a:extLst>
+              <a:ext uri="{FF2B5EF4-FFF2-40B4-BE49-F238E27FC236}">
+                <a16:creationId xmlns:a16="http://schemas.microsoft.com/office/drawing/2014/main" id="{EEB6C0E5-3967-C8C0-8BB7-888745EB8490}"/>
+              </a:ext>
+            </a:extLst>
+          </p:cNvPr>
+          <p:cNvSpPr/>
+          <p:nvPr/>
+        </p:nvSpPr>
+        <p:spPr>
+          <a:xfrm>
+            <a:off x="658873" y="4526114"/>
+            <a:ext cx="434109" cy="429543"/>
+          </a:xfrm>
+          <a:prstGeom prst="ellipse">
+            <a:avLst/>
+          </a:prstGeom>
+          <a:solidFill>
+            <a:schemeClr val="bg1"/>
+          </a:solidFill>
+          <a:ln>
+            <a:solidFill>
+              <a:schemeClr val="tx1"/>
+            </a:solidFill>
+          </a:ln>
+        </p:spPr>
+        <p:style>
+          <a:lnRef idx="2">
+            <a:schemeClr val="accent1">
+              <a:shade val="15000"/>
+            </a:schemeClr>
+          </a:lnRef>
+          <a:fillRef idx="1">
+            <a:schemeClr val="accent1"/>
+          </a:fillRef>
+          <a:effectRef idx="0">
+            <a:schemeClr val="accent1"/>
+          </a:effectRef>
+          <a:fontRef idx="minor">
+            <a:schemeClr val="lt1"/>
+          </a:fontRef>
+        </p:style>
+        <p:txBody>
+          <a:bodyPr rtlCol="0" anchor="ctr"/>
+          <a:lstStyle/>
+          <a:p>
+            <a:pPr algn="ctr"/>
+            <a:r>
+              <a:rPr lang="en-US" altLang="ko-KR" dirty="0">
+                <a:solidFill>
+                  <a:sysClr val="windowText" lastClr="000000"/>
+                </a:solidFill>
+              </a:rPr>
+              <a:t>2</a:t>
+            </a:r>
+            <a:endParaRPr lang="ko-KR" altLang="en-US" dirty="0">
+              <a:solidFill>
+                <a:sysClr val="windowText" lastClr="000000"/>
+              </a:solidFill>
+            </a:endParaRPr>
+          </a:p>
+        </p:txBody>
+      </p:sp>
+      <p:sp>
+        <p:nvSpPr>
+          <p:cNvPr id="56" name="타원 55">
+            <a:extLst>
+              <a:ext uri="{FF2B5EF4-FFF2-40B4-BE49-F238E27FC236}">
+                <a16:creationId xmlns:a16="http://schemas.microsoft.com/office/drawing/2014/main" id="{E419EC47-34CD-DDE3-9F44-D9C818C83F1E}"/>
+              </a:ext>
+            </a:extLst>
+          </p:cNvPr>
+          <p:cNvSpPr/>
+          <p:nvPr/>
+        </p:nvSpPr>
+        <p:spPr>
+          <a:xfrm>
+            <a:off x="4148234" y="3399121"/>
+            <a:ext cx="434109" cy="429543"/>
+          </a:xfrm>
+          <a:prstGeom prst="ellipse">
+            <a:avLst/>
+          </a:prstGeom>
+          <a:solidFill>
+            <a:schemeClr val="bg1"/>
+          </a:solidFill>
+          <a:ln>
+            <a:solidFill>
+              <a:schemeClr val="tx1"/>
+            </a:solidFill>
+          </a:ln>
+        </p:spPr>
+        <p:style>
+          <a:lnRef idx="2">
+            <a:schemeClr val="accent1">
+              <a:shade val="15000"/>
+            </a:schemeClr>
+          </a:lnRef>
+          <a:fillRef idx="1">
+            <a:schemeClr val="accent1"/>
+          </a:fillRef>
+          <a:effectRef idx="0">
+            <a:schemeClr val="accent1"/>
+          </a:effectRef>
+          <a:fontRef idx="minor">
+            <a:schemeClr val="lt1"/>
+          </a:fontRef>
+        </p:style>
+        <p:txBody>
+          <a:bodyPr rtlCol="0" anchor="ctr"/>
+          <a:lstStyle/>
+          <a:p>
+            <a:pPr algn="ctr"/>
+            <a:r>
+              <a:rPr lang="en-US" altLang="ko-KR" dirty="0">
+                <a:solidFill>
+                  <a:sysClr val="windowText" lastClr="000000"/>
+                </a:solidFill>
+              </a:rPr>
+              <a:t>3</a:t>
+            </a:r>
+            <a:endParaRPr lang="ko-KR" altLang="en-US" dirty="0">
+              <a:solidFill>
+                <a:sysClr val="windowText" lastClr="000000"/>
+              </a:solidFill>
+            </a:endParaRPr>
+          </a:p>
+        </p:txBody>
+      </p:sp>
+      <p:pic>
+        <p:nvPicPr>
+          <p:cNvPr id="59" name="내용 개체 틀 6" descr="에펠 탑 - 무료 건축과 도시개 아이콘">
+            <a:extLst>
+              <a:ext uri="{FF2B5EF4-FFF2-40B4-BE49-F238E27FC236}">
+                <a16:creationId xmlns:a16="http://schemas.microsoft.com/office/drawing/2014/main" id="{9E8541DB-EE8A-060B-B9AA-0E828088EC5B}"/>
+              </a:ext>
+            </a:extLst>
+          </p:cNvPr>
+          <p:cNvPicPr>
+            <a:picLocks noChangeAspect="1"/>
+          </p:cNvPicPr>
+          <p:nvPr/>
+        </p:nvPicPr>
+        <p:blipFill>
+          <a:blip r:embed="rId2"/>
+          <a:stretch>
+            <a:fillRect/>
+          </a:stretch>
+        </p:blipFill>
+        <p:spPr>
+          <a:xfrm>
+            <a:off x="5340382" y="2628531"/>
+            <a:ext cx="1541180" cy="1541180"/>
+          </a:xfrm>
+          <a:prstGeom prst="rect">
+            <a:avLst/>
+          </a:prstGeom>
+        </p:spPr>
+      </p:pic>
+      <p:pic>
+        <p:nvPicPr>
+          <p:cNvPr id="60" name="그림 59" descr="독수리 - 무료 동물개 아이콘">
+            <a:extLst>
+              <a:ext uri="{FF2B5EF4-FFF2-40B4-BE49-F238E27FC236}">
+                <a16:creationId xmlns:a16="http://schemas.microsoft.com/office/drawing/2014/main" id="{3069B905-5F45-6F1E-422B-FB963BAE2562}"/>
+              </a:ext>
+            </a:extLst>
+          </p:cNvPr>
+          <p:cNvPicPr>
+            <a:picLocks noChangeAspect="1"/>
+          </p:cNvPicPr>
+          <p:nvPr/>
+        </p:nvPicPr>
+        <p:blipFill>
+          <a:blip r:embed="rId3"/>
+          <a:stretch>
+            <a:fillRect/>
+          </a:stretch>
+        </p:blipFill>
+        <p:spPr>
+          <a:xfrm rot="5400000" flipV="1">
+            <a:off x="9114479" y="2872758"/>
+            <a:ext cx="1296953" cy="1296953"/>
+          </a:xfrm>
+          <a:prstGeom prst="rect">
+            <a:avLst/>
+          </a:prstGeom>
+        </p:spPr>
+      </p:pic>
+      <p:sp>
+        <p:nvSpPr>
+          <p:cNvPr id="62" name="내용 개체 틀 61">
+            <a:extLst>
+              <a:ext uri="{FF2B5EF4-FFF2-40B4-BE49-F238E27FC236}">
+                <a16:creationId xmlns:a16="http://schemas.microsoft.com/office/drawing/2014/main" id="{5181385A-BC07-B6AF-34EF-87EE9B69F133}"/>
+              </a:ext>
+            </a:extLst>
+          </p:cNvPr>
+          <p:cNvSpPr>
+            <a:spLocks noGrp="1"/>
+          </p:cNvSpPr>
+          <p:nvPr>
+            <p:ph idx="1"/>
+          </p:nvPr>
+        </p:nvSpPr>
+        <p:spPr/>
+        <p:txBody>
+          <a:bodyPr/>
+          <a:lstStyle/>
+          <a:p>
+            <a:endParaRPr lang="ko-KR" altLang="en-US" dirty="0"/>
+          </a:p>
+        </p:txBody>
+      </p:sp>
+      <p:pic>
+        <p:nvPicPr>
+          <p:cNvPr id="63" name="Picture 2" descr="Plane - Free transport icons">
+            <a:extLst>
+              <a:ext uri="{FF2B5EF4-FFF2-40B4-BE49-F238E27FC236}">
+                <a16:creationId xmlns:a16="http://schemas.microsoft.com/office/drawing/2014/main" id="{7E6CD74A-7077-F770-AA04-992A0C7B8847}"/>
+              </a:ext>
+            </a:extLst>
+          </p:cNvPr>
+          <p:cNvPicPr>
+            <a:picLocks noChangeAspect="1" noChangeArrowheads="1"/>
+          </p:cNvPicPr>
+          <p:nvPr/>
+        </p:nvPicPr>
+        <p:blipFill>
+          <a:blip r:embed="rId4">
+            <a:extLst>
+              <a:ext uri="{28A0092B-C50C-407E-A947-70E740481C1C}">
+                <a14:useLocalDpi xmlns:a14="http://schemas.microsoft.com/office/drawing/2010/main" val="0"/>
+              </a:ext>
+            </a:extLst>
+          </a:blip>
+          <a:srcRect/>
+          <a:stretch>
+            <a:fillRect/>
+          </a:stretch>
+        </p:blipFill>
+        <p:spPr bwMode="auto">
+          <a:xfrm>
+            <a:off x="7126819" y="2581155"/>
+            <a:ext cx="1681264" cy="1681264"/>
+          </a:xfrm>
+          <a:prstGeom prst="rect">
+            <a:avLst/>
+          </a:prstGeom>
+          <a:noFill/>
+          <a:extLst>
+            <a:ext uri="{909E8E84-426E-40DD-AFC4-6F175D3DCCD1}">
+              <a14:hiddenFill xmlns:a14="http://schemas.microsoft.com/office/drawing/2010/main">
+                <a:solidFill>
+                  <a:srgbClr val="FFFFFF"/>
+                </a:solidFill>
+              </a14:hiddenFill>
+            </a:ext>
+          </a:extLst>
+        </p:spPr>
+      </p:pic>
+    </p:spTree>
+    <p:extLst>
+      <p:ext uri="{BB962C8B-B14F-4D97-AF65-F5344CB8AC3E}">
+        <p14:creationId xmlns:p14="http://schemas.microsoft.com/office/powerpoint/2010/main" val="669699308"/>
       </p:ext>
     </p:extLst>
   </p:cSld>
